--- a/media/resources/files/Ekvivalenettuuluk_Kaytalanuuchu_Onduktardy_Bolchokko_XjanaO_ZAhDIyc.pptx
+++ b/media/resources/files/Ekvivalenettuuluk_Kaytalanuuchu_Onduktardy_Bolchokko_XjanaO_ZAhDIyc.pptx
@@ -3966,7 +3966,7 @@
                 <a:ea typeface="+mn-ea"/>
                 <a:cs typeface="Arial" panose="020B0604020202020204" pitchFamily="34" charset="0"/>
               </a:rPr>
-              <a:t>Мугалим үчүн жооп баракчасы жана таратма материалдар камтылган.</a:t>
+              <a:t>Мугалим үчүн жооп барагы жана таратма материалдар бар.</a:t>
             </a:r>
           </a:p>
           <a:p>
@@ -4035,7 +4035,7 @@
                 <a:ea typeface="+mn-ea"/>
                 <a:cs typeface="Arial" panose="020B0604020202020204" pitchFamily="34" charset="0"/>
               </a:rPr>
-              <a:t>Кайсы команда туура жооп бергенине жараша '</a:t>
+              <a:t>Туура жооп берген командага жараша «</a:t>
             </a:r>
             <a:r>
               <a:rPr kumimoji="0" lang="en-GB" sz="2000" b="0" i="0" u="sng" strike="noStrike" kern="1200" cap="none" spc="0" normalizeH="0" baseline="0" noProof="0" dirty="0">
@@ -4052,7 +4052,7 @@
                 <a:ea typeface="+mn-ea"/>
                 <a:cs typeface="Arial" panose="020B0604020202020204" pitchFamily="34" charset="0"/>
               </a:rPr>
-              <a:t>X' </a:t>
+              <a:t>X» </a:t>
             </a:r>
             <a:r>
               <a:rPr kumimoji="0" lang="ru-RU" sz="2000" b="0" i="0" u="sng" strike="noStrike" kern="1200" cap="none" spc="0" normalizeH="0" baseline="0" noProof="0" dirty="0">
@@ -4069,7 +4069,7 @@
                 <a:ea typeface="+mn-ea"/>
                 <a:cs typeface="Arial" panose="020B0604020202020204" pitchFamily="34" charset="0"/>
               </a:rPr>
-              <a:t>же '</a:t>
+              <a:t>же «</a:t>
             </a:r>
             <a:r>
               <a:rPr kumimoji="0" lang="en-GB" sz="2000" b="0" i="0" u="sng" strike="noStrike" kern="1200" cap="none" spc="0" normalizeH="0" baseline="0" noProof="0" dirty="0">
@@ -4086,7 +4086,7 @@
                 <a:ea typeface="+mn-ea"/>
                 <a:cs typeface="Arial" panose="020B0604020202020204" pitchFamily="34" charset="0"/>
               </a:rPr>
-              <a:t>O' </a:t>
+              <a:t>O» </a:t>
             </a:r>
             <a:r>
               <a:rPr kumimoji="0" lang="ru-RU" sz="2000" b="0" i="0" u="sng" strike="noStrike" kern="1200" cap="none" spc="0" normalizeH="0" baseline="0" noProof="0" dirty="0">
@@ -4103,7 +4103,7 @@
                 <a:ea typeface="+mn-ea"/>
                 <a:cs typeface="Arial" panose="020B0604020202020204" pitchFamily="34" charset="0"/>
               </a:rPr>
-              <a:t>баскычын басыңыз/тийип коюңуз</a:t>
+              <a:t>баскычын басыңыз</a:t>
             </a:r>
             <a:r>
               <a:rPr kumimoji="0" lang="en-GB" sz="2000" b="0" i="0" u="none" strike="noStrike" kern="1200" cap="none" spc="0" normalizeH="0" baseline="0" noProof="0" dirty="0">
@@ -4661,7 +4661,7 @@
             <a:pPr algn="ctr"/>
             <a:r>
               <a:rPr lang="en-GB" sz="5400" dirty="0"/>
-              <a:t>0.27</a:t>
+              <a:t>0,27</a:t>
             </a:r>
           </a:p>
         </p:txBody>
@@ -4754,7 +4754,7 @@
             <a:pPr algn="ctr"/>
             <a:r>
               <a:rPr lang="en-GB" sz="5400" dirty="0"/>
-              <a:t>0.26</a:t>
+              <a:t>0,26</a:t>
             </a:r>
           </a:p>
         </p:txBody>
@@ -4847,7 +4847,7 @@
             <a:pPr algn="ctr"/>
             <a:r>
               <a:rPr lang="en-GB" sz="5400" dirty="0"/>
-              <a:t>0.081</a:t>
+              <a:t>0,081</a:t>
             </a:r>
           </a:p>
         </p:txBody>
@@ -4940,7 +4940,7 @@
             <a:pPr algn="ctr"/>
             <a:r>
               <a:rPr lang="en-GB" sz="5400" dirty="0"/>
-              <a:t>0.5</a:t>
+              <a:t>0,5</a:t>
             </a:r>
           </a:p>
         </p:txBody>
@@ -5033,7 +5033,7 @@
             <a:pPr algn="ctr"/>
             <a:r>
               <a:rPr lang="en-GB" sz="5400" dirty="0"/>
-              <a:t>0.413</a:t>
+              <a:t>0,413</a:t>
             </a:r>
           </a:p>
         </p:txBody>
@@ -5126,7 +5126,7 @@
             <a:pPr algn="ctr"/>
             <a:r>
               <a:rPr lang="en-GB" sz="5400" dirty="0"/>
-              <a:t>1.2</a:t>
+              <a:t>1,2</a:t>
             </a:r>
           </a:p>
         </p:txBody>
@@ -5219,7 +5219,7 @@
             <a:pPr algn="ctr"/>
             <a:r>
               <a:rPr lang="en-GB" sz="5400" dirty="0"/>
-              <a:t>0.195</a:t>
+              <a:t>0,195</a:t>
             </a:r>
           </a:p>
         </p:txBody>
@@ -5312,7 +5312,7 @@
             <a:pPr algn="ctr"/>
             <a:r>
               <a:rPr lang="en-GB" sz="5400" dirty="0"/>
-              <a:t>0.23</a:t>
+              <a:t>0,23</a:t>
             </a:r>
           </a:p>
         </p:txBody>
@@ -5405,7 +5405,7 @@
             <a:pPr algn="ctr"/>
             <a:r>
               <a:rPr lang="en-GB" sz="5400" dirty="0"/>
-              <a:t>0.63</a:t>
+              <a:t>0,63</a:t>
             </a:r>
           </a:p>
         </p:txBody>
